--- a/research-materials/src/template.pptx
+++ b/research-materials/src/template.pptx
@@ -3182,7 +3182,7 @@
         <p:spPr>
           <a:xfrm>
             <a:off x="0" y="855796"/>
-            <a:ext cx="5115503" cy="300082"/>
+            <a:ext cx="6200000" cy="300082"/>
           </a:xfrm>
           <a:prstGeom prst="rect">
             <a:avLst/>
@@ -3640,12 +3640,12 @@
     </a:clrScheme>
     <a:fontScheme name="mixlab">
       <a:majorFont>
-        <a:latin typeface="Arial"/>
+        <a:latin typeface="BIZ UDPゴシック"/>
         <a:ea typeface="BIZ UDPゴシック"/>
         <a:cs typeface=""/>
       </a:majorFont>
       <a:minorFont>
-        <a:latin typeface="Arial"/>
+        <a:latin typeface="BIZ UDPゴシック"/>
         <a:ea typeface="BIZ UDPゴシック"/>
         <a:cs typeface=""/>
       </a:minorFont>
@@ -3841,7 +3841,7 @@
     </a:clrScheme>
     <a:fontScheme name="Office">
       <a:majorFont>
-        <a:latin typeface="游ゴシック Light" panose="020F0302020204030204"/>
+        <a:latin typeface="BIZ UDPゴシック"/>
         <a:ea typeface=""/>
         <a:cs typeface=""/>
         <a:font script="Jpan" typeface="游ゴシック Light"/>
@@ -3876,7 +3876,7 @@
         <a:font script="Geor" typeface="Sylfaen"/>
       </a:majorFont>
       <a:minorFont>
-        <a:latin typeface="游ゴシック" panose="020F0502020204030204"/>
+        <a:latin typeface="BIZ UDPゴシック"/>
         <a:ea typeface=""/>
         <a:cs typeface=""/>
         <a:font script="Jpan" typeface="游ゴシック"/>
